--- a/m1/diapositivos/aula-05-f19.pptx
+++ b/m1/diapositivos/aula-05-f19.pptx
@@ -4752,7 +4752,7 @@
                 <a:ea typeface="Arial" pitchFamily="34" charset="-122"/>
                 <a:cs typeface="Arial" pitchFamily="34" charset="-120"/>
               </a:rPr>
-              <a:t>Em Mendinho ameaça e cerca; em Codax ouve a pergunta, como confidente</a:t>
+              <a:t>Em Mendinho cerca; em Codax ouve, como confidente</a:t>
             </a:r>
             <a:endParaRPr lang="en-US" sz="3400" dirty="0"/>
           </a:p>
@@ -18007,7 +18007,7 @@
                 <a:ea typeface="Arial" pitchFamily="34" charset="-122"/>
                 <a:cs typeface="Arial" pitchFamily="34" charset="-120"/>
               </a:rPr>
-              <a:t>Nas duas, o mar é só paisagem</a:t>
+              <a:t>Nas duas, o mar é só paisagem, sem papel na cena</a:t>
             </a:r>
             <a:endParaRPr lang="en-US" sz="2400" dirty="0"/>
           </a:p>
@@ -18115,7 +18115,7 @@
                 <a:ea typeface="Arial" pitchFamily="34" charset="-122"/>
                 <a:cs typeface="Arial" pitchFamily="34" charset="-120"/>
               </a:rPr>
-              <a:t>Em Codax ameaça; em Mendinho ouve e consola</a:t>
+              <a:t>Em Codax ameaça e cerca; em Mendinho ouve e consola</a:t>
             </a:r>
             <a:endParaRPr lang="en-US" sz="2400" dirty="0"/>
           </a:p>
@@ -18194,7 +18194,7 @@
         <p:spPr>
           <a:xfrm>
             <a:off x="1417320" y="4501896"/>
-            <a:ext cx="9174175" cy="981456"/>
+            <a:ext cx="9174175" cy="600456"/>
           </a:xfrm>
           <a:prstGeom prst="rect">
             <a:avLst/>
@@ -18223,7 +18223,7 @@
                 <a:ea typeface="Arial" pitchFamily="34" charset="-122"/>
                 <a:cs typeface="Arial" pitchFamily="34" charset="-120"/>
               </a:rPr>
-              <a:t>Em Mendinho ameaça e cerca; em Codax ouve a pergunta, como confidente</a:t>
+              <a:t>Em Mendinho cerca; em Codax ouve, como confidente</a:t>
             </a:r>
             <a:endParaRPr lang="en-US" sz="2400" dirty="0"/>
           </a:p>

--- a/m1/diapositivos/aula-05-f19.pptx
+++ b/m1/diapositivos/aula-05-f19.pptx
@@ -7852,7 +7852,7 @@
                 <a:ea typeface="Georgia" pitchFamily="34" charset="-122"/>
                 <a:cs typeface="Georgia" pitchFamily="34" charset="-120"/>
               </a:rPr>
-              <a:t>D. Dinis e Guilhade prometem louvar. Qual promessa é irónica, e onde está a prova?</a:t>
+              <a:t>D. Dinis e Guilhade prometem louvar. Qual das promessas é irónica, e onde está a prova?</a:t>
             </a:r>
             <a:endParaRPr lang="en-US" sz="3200" dirty="0"/>
           </a:p>
